--- a/FVM.pptx
+++ b/FVM.pptx
@@ -198,7 +198,7 @@
           <a:p>
             <a:fld id="{E98AEFC5-E215-4F6A-919E-77DE21757023}" type="datetimeFigureOut">
               <a:rPr lang="LID4096" smtClean="0"/>
-              <a:t>06/24/2026</a:t>
+              <a:t>06/26/2026</a:t>
             </a:fld>
             <a:endParaRPr lang="LID4096"/>
           </a:p>
@@ -615,7 +615,7 @@
           <a:p>
             <a:fld id="{D3E17CEB-EE26-4CFC-BFE9-9925B866603C}" type="datetimeFigureOut">
               <a:rPr lang="LID4096" smtClean="0"/>
-              <a:t>06/24/2026</a:t>
+              <a:t>06/26/2026</a:t>
             </a:fld>
             <a:endParaRPr lang="LID4096"/>
           </a:p>
@@ -815,7 +815,7 @@
           <a:p>
             <a:fld id="{D3E17CEB-EE26-4CFC-BFE9-9925B866603C}" type="datetimeFigureOut">
               <a:rPr lang="LID4096" smtClean="0"/>
-              <a:t>06/24/2026</a:t>
+              <a:t>06/26/2026</a:t>
             </a:fld>
             <a:endParaRPr lang="LID4096"/>
           </a:p>
@@ -1025,7 +1025,7 @@
           <a:p>
             <a:fld id="{D3E17CEB-EE26-4CFC-BFE9-9925B866603C}" type="datetimeFigureOut">
               <a:rPr lang="LID4096" smtClean="0"/>
-              <a:t>06/24/2026</a:t>
+              <a:t>06/26/2026</a:t>
             </a:fld>
             <a:endParaRPr lang="LID4096"/>
           </a:p>
@@ -1225,7 +1225,7 @@
           <a:p>
             <a:fld id="{D3E17CEB-EE26-4CFC-BFE9-9925B866603C}" type="datetimeFigureOut">
               <a:rPr lang="LID4096" smtClean="0"/>
-              <a:t>06/24/2026</a:t>
+              <a:t>06/26/2026</a:t>
             </a:fld>
             <a:endParaRPr lang="LID4096"/>
           </a:p>
@@ -1501,7 +1501,7 @@
           <a:p>
             <a:fld id="{D3E17CEB-EE26-4CFC-BFE9-9925B866603C}" type="datetimeFigureOut">
               <a:rPr lang="LID4096" smtClean="0"/>
-              <a:t>06/24/2026</a:t>
+              <a:t>06/26/2026</a:t>
             </a:fld>
             <a:endParaRPr lang="LID4096"/>
           </a:p>
@@ -1769,7 +1769,7 @@
           <a:p>
             <a:fld id="{D3E17CEB-EE26-4CFC-BFE9-9925B866603C}" type="datetimeFigureOut">
               <a:rPr lang="LID4096" smtClean="0"/>
-              <a:t>06/24/2026</a:t>
+              <a:t>06/26/2026</a:t>
             </a:fld>
             <a:endParaRPr lang="LID4096"/>
           </a:p>
@@ -2184,7 +2184,7 @@
           <a:p>
             <a:fld id="{D3E17CEB-EE26-4CFC-BFE9-9925B866603C}" type="datetimeFigureOut">
               <a:rPr lang="LID4096" smtClean="0"/>
-              <a:t>06/24/2026</a:t>
+              <a:t>06/26/2026</a:t>
             </a:fld>
             <a:endParaRPr lang="LID4096"/>
           </a:p>
@@ -2326,7 +2326,7 @@
           <a:p>
             <a:fld id="{D3E17CEB-EE26-4CFC-BFE9-9925B866603C}" type="datetimeFigureOut">
               <a:rPr lang="LID4096" smtClean="0"/>
-              <a:t>06/24/2026</a:t>
+              <a:t>06/26/2026</a:t>
             </a:fld>
             <a:endParaRPr lang="LID4096"/>
           </a:p>
@@ -2439,7 +2439,7 @@
           <a:p>
             <a:fld id="{D3E17CEB-EE26-4CFC-BFE9-9925B866603C}" type="datetimeFigureOut">
               <a:rPr lang="LID4096" smtClean="0"/>
-              <a:t>06/24/2026</a:t>
+              <a:t>06/26/2026</a:t>
             </a:fld>
             <a:endParaRPr lang="LID4096"/>
           </a:p>
@@ -2752,7 +2752,7 @@
           <a:p>
             <a:fld id="{D3E17CEB-EE26-4CFC-BFE9-9925B866603C}" type="datetimeFigureOut">
               <a:rPr lang="LID4096" smtClean="0"/>
-              <a:t>06/24/2026</a:t>
+              <a:t>06/26/2026</a:t>
             </a:fld>
             <a:endParaRPr lang="LID4096"/>
           </a:p>
@@ -3041,7 +3041,7 @@
           <a:p>
             <a:fld id="{D3E17CEB-EE26-4CFC-BFE9-9925B866603C}" type="datetimeFigureOut">
               <a:rPr lang="LID4096" smtClean="0"/>
-              <a:t>06/24/2026</a:t>
+              <a:t>06/26/2026</a:t>
             </a:fld>
             <a:endParaRPr lang="LID4096"/>
           </a:p>
@@ -3284,7 +3284,7 @@
           <a:p>
             <a:fld id="{D3E17CEB-EE26-4CFC-BFE9-9925B866603C}" type="datetimeFigureOut">
               <a:rPr lang="LID4096" smtClean="0"/>
-              <a:t>06/24/2026</a:t>
+              <a:t>06/26/2026</a:t>
             </a:fld>
             <a:endParaRPr lang="LID4096"/>
           </a:p>
@@ -4278,97 +4278,118 @@
           </a:p>
         </p:txBody>
       </p:sp>
-      <p:pic>
-        <p:nvPicPr>
-          <p:cNvPr id="16" name="Picture 15">
+      <p:grpSp>
+        <p:nvGrpSpPr>
+          <p:cNvPr id="3" name="Group 2">
             <a:extLst>
               <a:ext uri="{FF2B5EF4-FFF2-40B4-BE49-F238E27FC236}">
-                <a16:creationId xmlns:a16="http://schemas.microsoft.com/office/drawing/2014/main" id="{8E63959C-3FF5-1DDE-ED4D-1CA56AC6E902}"/>
+                <a16:creationId xmlns:a16="http://schemas.microsoft.com/office/drawing/2014/main" id="{F6B3099E-3C8C-79A7-0149-342A2B9259BD}"/>
               </a:ext>
             </a:extLst>
           </p:cNvPr>
-          <p:cNvPicPr>
-            <a:picLocks noChangeAspect="1"/>
-          </p:cNvPicPr>
+          <p:cNvGrpSpPr/>
           <p:nvPr/>
-        </p:nvPicPr>
-        <p:blipFill>
-          <a:blip r:embed="rId3"/>
-          <a:stretch>
-            <a:fillRect/>
-          </a:stretch>
-        </p:blipFill>
-        <p:spPr>
+        </p:nvGrpSpPr>
+        <p:grpSpPr>
           <a:xfrm>
-            <a:off x="8767132" y="5286173"/>
-            <a:ext cx="947946" cy="1071592"/>
+            <a:off x="9037472" y="5126868"/>
+            <a:ext cx="1841633" cy="1071592"/>
+            <a:chOff x="8767132" y="5286173"/>
+            <a:chExt cx="1841633" cy="1071592"/>
           </a:xfrm>
-          <a:prstGeom prst="rect">
-            <a:avLst/>
-          </a:prstGeom>
-          <a:ln>
-            <a:solidFill>
-              <a:schemeClr val="tx1"/>
-            </a:solidFill>
-          </a:ln>
-          <a:effectLst>
-            <a:outerShdw blurRad="76200" dir="13500000" sy="23000" kx="1200000" algn="br" rotWithShape="0">
-              <a:prstClr val="black">
-                <a:alpha val="20000"/>
-              </a:prstClr>
-            </a:outerShdw>
-          </a:effectLst>
-        </p:spPr>
-      </p:pic>
-      <p:sp>
-        <p:nvSpPr>
-          <p:cNvPr id="14" name="TextBox 13">
-            <a:extLst>
-              <a:ext uri="{FF2B5EF4-FFF2-40B4-BE49-F238E27FC236}">
-                <a16:creationId xmlns:a16="http://schemas.microsoft.com/office/drawing/2014/main" id="{98201D0F-299B-D8CB-2F50-B70D9020022B}"/>
-              </a:ext>
-            </a:extLst>
-          </p:cNvPr>
-          <p:cNvSpPr txBox="1"/>
-          <p:nvPr/>
-        </p:nvSpPr>
-        <p:spPr>
-          <a:xfrm>
-            <a:off x="9723945" y="5831089"/>
-            <a:ext cx="884820" cy="523220"/>
-          </a:xfrm>
-          <a:prstGeom prst="rect">
-            <a:avLst/>
-          </a:prstGeom>
-          <a:noFill/>
-        </p:spPr>
-        <p:txBody>
-          <a:bodyPr wrap="square">
-            <a:spAutoFit/>
-          </a:bodyPr>
-          <a:lstStyle/>
-          <a:p>
-            <a:pPr algn="r"/>
-            <a:r>
-              <a:rPr lang="pt-BR" sz="2800" b="1" dirty="0"/>
-              <a:t>Fi</a:t>
-            </a:r>
-            <a:r>
-              <a:rPr lang="pt-BR" sz="2800" b="1" dirty="0">
+        </p:grpSpPr>
+        <p:pic>
+          <p:nvPicPr>
+            <p:cNvPr id="16" name="Picture 15">
+              <a:extLst>
+                <a:ext uri="{FF2B5EF4-FFF2-40B4-BE49-F238E27FC236}">
+                  <a16:creationId xmlns:a16="http://schemas.microsoft.com/office/drawing/2014/main" id="{8E63959C-3FF5-1DDE-ED4D-1CA56AC6E902}"/>
+                </a:ext>
+              </a:extLst>
+            </p:cNvPr>
+            <p:cNvPicPr>
+              <a:picLocks noChangeAspect="1"/>
+            </p:cNvPicPr>
+            <p:nvPr/>
+          </p:nvPicPr>
+          <p:blipFill>
+            <a:blip r:embed="rId3"/>
+            <a:stretch>
+              <a:fillRect/>
+            </a:stretch>
+          </p:blipFill>
+          <p:spPr>
+            <a:xfrm>
+              <a:off x="8767132" y="5286173"/>
+              <a:ext cx="947946" cy="1071592"/>
+            </a:xfrm>
+            <a:prstGeom prst="rect">
+              <a:avLst/>
+            </a:prstGeom>
+            <a:ln>
+              <a:solidFill>
+                <a:schemeClr val="tx1"/>
+              </a:solidFill>
+            </a:ln>
+            <a:effectLst>
+              <a:outerShdw blurRad="76200" dir="13500000" sy="23000" kx="1200000" algn="br" rotWithShape="0">
+                <a:prstClr val="black">
+                  <a:alpha val="20000"/>
+                </a:prstClr>
+              </a:outerShdw>
+            </a:effectLst>
+          </p:spPr>
+        </p:pic>
+        <p:sp>
+          <p:nvSpPr>
+            <p:cNvPr id="14" name="TextBox 13">
+              <a:extLst>
+                <a:ext uri="{FF2B5EF4-FFF2-40B4-BE49-F238E27FC236}">
+                  <a16:creationId xmlns:a16="http://schemas.microsoft.com/office/drawing/2014/main" id="{98201D0F-299B-D8CB-2F50-B70D9020022B}"/>
+                </a:ext>
+              </a:extLst>
+            </p:cNvPr>
+            <p:cNvSpPr txBox="1"/>
+            <p:nvPr/>
+          </p:nvSpPr>
+          <p:spPr>
+            <a:xfrm>
+              <a:off x="9723945" y="5831089"/>
+              <a:ext cx="884820" cy="523220"/>
+            </a:xfrm>
+            <a:prstGeom prst="rect">
+              <a:avLst/>
+            </a:prstGeom>
+            <a:noFill/>
+          </p:spPr>
+          <p:txBody>
+            <a:bodyPr wrap="square">
+              <a:spAutoFit/>
+            </a:bodyPr>
+            <a:lstStyle/>
+            <a:p>
+              <a:pPr algn="r"/>
+              <a:r>
+                <a:rPr lang="pt-BR" sz="2800" b="1" dirty="0"/>
+                <a:t>Fi</a:t>
+              </a:r>
+              <a:r>
+                <a:rPr lang="pt-BR" sz="2800" b="1" dirty="0">
+                  <a:solidFill>
+                    <a:srgbClr val="FF0000"/>
+                  </a:solidFill>
+                </a:rPr>
+                <a:t>Py</a:t>
+              </a:r>
+              <a:endParaRPr lang="pt-BR" sz="2000" dirty="0">
                 <a:solidFill>
                   <a:srgbClr val="FF0000"/>
                 </a:solidFill>
-              </a:rPr>
-              <a:t>Py</a:t>
-            </a:r>
-            <a:endParaRPr lang="pt-BR" sz="2000" dirty="0">
-              <a:solidFill>
-                <a:srgbClr val="FF0000"/>
-              </a:solidFill>
-            </a:endParaRPr>
-          </a:p>
-        </p:txBody>
-      </p:sp>
+              </a:endParaRPr>
+            </a:p>
+          </p:txBody>
+        </p:sp>
+      </p:grpSp>
       <p:sp>
         <p:nvSpPr>
           <p:cNvPr id="20" name="Object 4">
@@ -5532,7 +5553,7 @@
         </p:nvSpPr>
         <p:spPr>
           <a:xfrm>
-            <a:off x="9034334" y="1496248"/>
+            <a:off x="9037472" y="1214549"/>
             <a:ext cx="2528273" cy="3384368"/>
           </a:xfrm>
           <a:prstGeom prst="rect">
@@ -7231,8 +7252,8 @@
           </mc:Fallback>
         </mc:AlternateContent>
       </p:grpSp>
-      <mc:AlternateContent xmlns:mc="http://schemas.openxmlformats.org/markup-compatibility/2006">
-        <mc:Choice xmlns:a14="http://schemas.microsoft.com/office/drawing/2010/main" Requires="a14">
+      <mc:AlternateContent xmlns:mc="http://schemas.openxmlformats.org/markup-compatibility/2006" xmlns:a14="http://schemas.microsoft.com/office/drawing/2010/main">
+        <mc:Choice Requires="a14">
           <p:sp>
             <p:nvSpPr>
               <p:cNvPr id="18" name="Object 4">
@@ -7809,7 +7830,7 @@
             </p:txBody>
           </p:sp>
         </mc:Choice>
-        <mc:Fallback>
+        <mc:Fallback xmlns="">
           <p:sp>
             <p:nvSpPr>
               <p:cNvPr id="18" name="Object 4">
@@ -9777,8 +9798,8 @@
           </p:txBody>
         </p:sp>
       </p:grpSp>
-      <mc:AlternateContent xmlns:mc="http://schemas.openxmlformats.org/markup-compatibility/2006">
-        <mc:Choice xmlns:a14="http://schemas.microsoft.com/office/drawing/2010/main" Requires="a14">
+      <mc:AlternateContent xmlns:mc="http://schemas.openxmlformats.org/markup-compatibility/2006" xmlns:a14="http://schemas.microsoft.com/office/drawing/2010/main">
+        <mc:Choice Requires="a14">
           <p:sp>
             <p:nvSpPr>
               <p:cNvPr id="32" name="Object 4">
@@ -9985,7 +10006,7 @@
             </p:txBody>
           </p:sp>
         </mc:Choice>
-        <mc:Fallback>
+        <mc:Fallback xmlns="">
           <p:sp>
             <p:nvSpPr>
               <p:cNvPr id="32" name="Object 4">
@@ -10033,8 +10054,8 @@
           </p:sp>
         </mc:Fallback>
       </mc:AlternateContent>
-      <mc:AlternateContent xmlns:mc="http://schemas.openxmlformats.org/markup-compatibility/2006">
-        <mc:Choice xmlns:a14="http://schemas.microsoft.com/office/drawing/2010/main" Requires="a14">
+      <mc:AlternateContent xmlns:mc="http://schemas.openxmlformats.org/markup-compatibility/2006" xmlns:a14="http://schemas.microsoft.com/office/drawing/2010/main">
+        <mc:Choice Requires="a14">
           <p:sp>
             <p:nvSpPr>
               <p:cNvPr id="33" name="Object 4">
@@ -10177,7 +10198,7 @@
             </p:txBody>
           </p:sp>
         </mc:Choice>
-        <mc:Fallback>
+        <mc:Fallback xmlns="">
           <p:sp>
             <p:nvSpPr>
               <p:cNvPr id="33" name="Object 4">
